--- a/classes/parte-10-seguridad-en-la-nube-y-contenedores/224-seguridad-en-azure/clase-224-presentacion.pptx
+++ b/classes/parte-10-seguridad-en-la-nube-y-contenedores/224-seguridad-en-azure/clase-224-presentacion.pptx
@@ -17,6 +17,10 @@
     <p:sldId id="265" r:id="rId16"/>
     <p:sldId id="266" r:id="rId17"/>
     <p:sldId id="267" r:id="rId18"/>
+    <p:sldId id="268" r:id="rId19"/>
+    <p:sldId id="269" r:id="rId20"/>
+    <p:sldId id="270" r:id="rId21"/>
+    <p:sldId id="271" r:id="rId22"/>
   </p:sldIdLst>
   <p:sldSz cx="9144000" cy="6858000" type="screen4x3"/>
   <p:notesSz cx="6858000" cy="9144000"/>
@@ -3198,7 +3202,7 @@
                   <a:srgbClr val="0B3D2E"/>
                 </a:solidFill>
               </a:rPr>
-              <a:t>⚠️ Errores comunes</a:t>
+              <a:t>🧪 Laboratorio guiado</a:t>
             </a:r>
           </a:p>
         </p:txBody>
@@ -3236,67 +3240,97 @@
                   <a:srgbClr val="22282E"/>
                 </a:solidFill>
               </a:rPr>
-              <a:t>•  Rol asignado pero sin permisos esperados — Ámbito equivocado; verifica si se asignó a recurso, grupo o suscripción.</a:t>
-            </a:r>
-          </a:p>
-          <a:p>
-            <a:pPr>
-              <a:spcAft>
-                <a:spcPts val="600"/>
-              </a:spcAft>
-            </a:pPr>
-            <a:r>
-              <a:rPr sz="1500">
-                <a:solidFill>
-                  <a:srgbClr val="22282E"/>
-                </a:solidFill>
-              </a:rPr>
-              <a:t>•  Policy no bloquea despliegues — Efecto en Audit en vez de Deny; cambia el efecto y reasigna.</a:t>
-            </a:r>
-          </a:p>
-          <a:p>
-            <a:pPr>
-              <a:spcAft>
-                <a:spcPts val="600"/>
-              </a:spcAft>
-            </a:pPr>
-            <a:r>
-              <a:rPr sz="1500">
-                <a:solidFill>
-                  <a:srgbClr val="22282E"/>
-                </a:solidFill>
-              </a:rPr>
-              <a:t>•  NSG "no aplica" a una VM — Regla de menor prioridad la anula, o el NSG está en la subred equivocada.</a:t>
-            </a:r>
-          </a:p>
-          <a:p>
-            <a:pPr>
-              <a:spcAft>
-                <a:spcPts val="600"/>
-              </a:spcAft>
-            </a:pPr>
-            <a:r>
-              <a:rPr sz="1500">
-                <a:solidFill>
-                  <a:srgbClr val="22282E"/>
-                </a:solidFill>
-              </a:rPr>
-              <a:t>•  Secreto en el código de la app — No se usó Key Vault + managed identity; migra y rota el secreto.</a:t>
-            </a:r>
-          </a:p>
-          <a:p>
-            <a:pPr>
-              <a:spcAft>
-                <a:spcPts val="600"/>
-              </a:spcAft>
-            </a:pPr>
-            <a:r>
-              <a:rPr sz="1500">
-                <a:solidFill>
-                  <a:srgbClr val="22282E"/>
-                </a:solidFill>
-              </a:rPr>
-              <a:t>•  Secure Score estancado — Recomendaciones marcadas como exentas; revisa exenciones y aplica los controles.</a:t>
+              <a:t>•  Crea un grupo de recursos de laboratorio y asigna a un usuario el rol Reader solo en ese ámbito; verifica que no puede crear recursos.</a:t>
+            </a:r>
+          </a:p>
+          <a:p>
+            <a:pPr>
+              <a:spcAft>
+                <a:spcPts val="600"/>
+              </a:spcAft>
+            </a:pPr>
+            <a:r>
+              <a:rPr sz="1500">
+                <a:solidFill>
+                  <a:srgbClr val="22282E"/>
+                </a:solidFill>
+              </a:rPr>
+              <a:t>•  Habilita MFA y una política de Conditional Access que exija MFA para roles administrativos.</a:t>
+            </a:r>
+          </a:p>
+          <a:p>
+            <a:pPr>
+              <a:spcAft>
+                <a:spcPts val="600"/>
+              </a:spcAft>
+            </a:pPr>
+            <a:r>
+              <a:rPr sz="1500">
+                <a:solidFill>
+                  <a:srgbClr val="22282E"/>
+                </a:solidFill>
+              </a:rPr>
+              <a:t>•  Define un Management Group y aplica una Azure Policy que deniegue la creación de cuentas de almacenamiento con acceso público. Intenta crear una y confirma el Deny.</a:t>
+            </a:r>
+          </a:p>
+          <a:p>
+            <a:pPr>
+              <a:spcAft>
+                <a:spcPts val="600"/>
+              </a:spcAft>
+            </a:pPr>
+            <a:r>
+              <a:rPr sz="1500">
+                <a:solidFill>
+                  <a:srgbClr val="22282E"/>
+                </a:solidFill>
+              </a:rPr>
+              <a:t>•  Crea una VNet con dos subredes y un NSG que permita solo HTTPS entrante; asocia el NSG a la subred.</a:t>
+            </a:r>
+          </a:p>
+          <a:p>
+            <a:pPr>
+              <a:spcAft>
+                <a:spcPts val="600"/>
+              </a:spcAft>
+            </a:pPr>
+            <a:r>
+              <a:rPr sz="1500">
+                <a:solidFill>
+                  <a:srgbClr val="22282E"/>
+                </a:solidFill>
+              </a:rPr>
+              <a:t>•  Habilita Defender for Cloud en la suscripción, revisa el Secure Score y aplica tres recomendaciones prioritarias.</a:t>
+            </a:r>
+          </a:p>
+          <a:p>
+            <a:pPr>
+              <a:spcAft>
+                <a:spcPts val="600"/>
+              </a:spcAft>
+            </a:pPr>
+            <a:r>
+              <a:rPr sz="1500">
+                <a:solidFill>
+                  <a:srgbClr val="22282E"/>
+                </a:solidFill>
+              </a:rPr>
+              <a:t>•  Crea un Key Vault, guarda un secreto y concede acceso a una identidad administrada (managed identity) en vez de credenciales estáticas.</a:t>
+            </a:r>
+          </a:p>
+          <a:p>
+            <a:pPr>
+              <a:spcAft>
+                <a:spcPts val="600"/>
+              </a:spcAft>
+            </a:pPr>
+            <a:r>
+              <a:rPr sz="1500">
+                <a:solidFill>
+                  <a:srgbClr val="22282E"/>
+                </a:solidFill>
+              </a:rPr>
+              <a:t>•  Ejecuta scout azure o prowler azure --compliance cis2.0azure y corrige los hallazgos altos de red y almacenamiento.</a:t>
             </a:r>
           </a:p>
         </p:txBody>
@@ -3347,7 +3381,7 @@
                   <a:srgbClr val="0B3D2E"/>
                 </a:solidFill>
               </a:rPr>
-              <a:t>❓ Preguntas frecuentes</a:t>
+              <a:t>✍️ Ejercicios</a:t>
             </a:r>
           </a:p>
         </p:txBody>
@@ -3385,82 +3419,82 @@
                   <a:srgbClr val="22282E"/>
                 </a:solidFill>
               </a:rPr>
-              <a:t>•  ❓ ¿Cuál es la diferencia entre roles de Entra ID y roles de Azure RBAC?</a:t>
-            </a:r>
-          </a:p>
-          <a:p>
-            <a:pPr>
-              <a:spcAft>
-                <a:spcPts val="600"/>
-              </a:spcAft>
-            </a:pPr>
-            <a:r>
-              <a:rPr sz="1500">
-                <a:solidFill>
-                  <a:srgbClr val="22282E"/>
-                </a:solidFill>
-              </a:rPr>
-              <a:t>•  Los roles de Entra ID gobiernan el directorio (usuarios, grupos, apps); los de Azure RBAC gobiernan recursos (VMs, storage). Un Global Admin de Entra no es automáticamente Owner de recursos.</a:t>
-            </a:r>
-          </a:p>
-          <a:p>
-            <a:pPr>
-              <a:spcAft>
-                <a:spcPts val="600"/>
-              </a:spcAft>
-            </a:pPr>
-            <a:r>
-              <a:rPr sz="1500">
-                <a:solidFill>
-                  <a:srgbClr val="22282E"/>
-                </a:solidFill>
-              </a:rPr>
-              <a:t>•  ❓ ¿Defender for Cloud tiene coste?</a:t>
-            </a:r>
-          </a:p>
-          <a:p>
-            <a:pPr>
-              <a:spcAft>
-                <a:spcPts val="600"/>
-              </a:spcAft>
-            </a:pPr>
-            <a:r>
-              <a:rPr sz="1500">
-                <a:solidFill>
-                  <a:srgbClr val="22282E"/>
-                </a:solidFill>
-              </a:rPr>
-              <a:t>•  El nivel CSPM básico es gratuito; los planes de protección de cargas (servidores, contenedores, bases de datos) se facturan por recurso. Actívalos según el riesgo.</a:t>
-            </a:r>
-          </a:p>
-          <a:p>
-            <a:pPr>
-              <a:spcAft>
-                <a:spcPts val="600"/>
-              </a:spcAft>
-            </a:pPr>
-            <a:r>
-              <a:rPr sz="1500">
-                <a:solidFill>
-                  <a:srgbClr val="22282E"/>
-                </a:solidFill>
-              </a:rPr>
-              <a:t>•  ❓ ¿Managed identity o service principal con secreto?</a:t>
-            </a:r>
-          </a:p>
-          <a:p>
-            <a:pPr>
-              <a:spcAft>
-                <a:spcPts val="600"/>
-              </a:spcAft>
-            </a:pPr>
-            <a:r>
-              <a:rPr sz="1500">
-                <a:solidFill>
-                  <a:srgbClr val="22282E"/>
-                </a:solidFill>
-              </a:rPr>
-              <a:t>•  Managed identity siempre que sea posible: Azure gestiona y rota las credenciales automáticamente, sin secretos que se filtren.</a:t>
+              <a:t>•  Asigna un rol personalizado que permita solo iniciar/detener VMs, sin borrarlas.</a:t>
+            </a:r>
+          </a:p>
+          <a:p>
+            <a:pPr>
+              <a:spcAft>
+                <a:spcPts val="600"/>
+              </a:spcAft>
+            </a:pPr>
+            <a:r>
+              <a:rPr sz="1500">
+                <a:solidFill>
+                  <a:srgbClr val="22282E"/>
+                </a:solidFill>
+              </a:rPr>
+              <a:t>•  Escribe una Azure Policy que exija etiquetas obligatorias en todos los recursos.</a:t>
+            </a:r>
+          </a:p>
+          <a:p>
+            <a:pPr>
+              <a:spcAft>
+                <a:spcPts val="600"/>
+              </a:spcAft>
+            </a:pPr>
+            <a:r>
+              <a:rPr sz="1500">
+                <a:solidFill>
+                  <a:srgbClr val="22282E"/>
+                </a:solidFill>
+              </a:rPr>
+              <a:t>•  Configura un NSG con reglas por prioridad y explica cuál gana ante un conflicto.</a:t>
+            </a:r>
+          </a:p>
+          <a:p>
+            <a:pPr>
+              <a:spcAft>
+                <a:spcPts val="600"/>
+              </a:spcAft>
+            </a:pPr>
+            <a:r>
+              <a:rPr sz="1500">
+                <a:solidFill>
+                  <a:srgbClr val="22282E"/>
+                </a:solidFill>
+              </a:rPr>
+              <a:t>•  Integra una managed identity para que una VM lea un secreto de Key Vault sin credenciales.</a:t>
+            </a:r>
+          </a:p>
+          <a:p>
+            <a:pPr>
+              <a:spcAft>
+                <a:spcPts val="600"/>
+              </a:spcAft>
+            </a:pPr>
+            <a:r>
+              <a:rPr sz="1500">
+                <a:solidFill>
+                  <a:srgbClr val="22282E"/>
+                </a:solidFill>
+              </a:rPr>
+              <a:t>•  Conecta Defender for Cloud a Microsoft Sentinel y crea una regla de detección.</a:t>
+            </a:r>
+          </a:p>
+          <a:p>
+            <a:pPr>
+              <a:spcAft>
+                <a:spcPts val="600"/>
+              </a:spcAft>
+            </a:pPr>
+            <a:r>
+              <a:rPr sz="1500">
+                <a:solidFill>
+                  <a:srgbClr val="22282E"/>
+                </a:solidFill>
+              </a:rPr>
+              <a:t>•  Interpreta una recomendación de Secure Score y estima su impacto en la puntuación.</a:t>
             </a:r>
           </a:p>
         </p:txBody>
@@ -3511,7 +3545,7 @@
                   <a:srgbClr val="0B3D2E"/>
                 </a:solidFill>
               </a:rPr>
-              <a:t>🔗 Referencias</a:t>
+              <a:t>📝 Reto verificable</a:t>
             </a:r>
           </a:p>
         </p:txBody>
@@ -3549,71 +3583,638 @@
                   <a:srgbClr val="22282E"/>
                 </a:solidFill>
               </a:rPr>
-              <a:t>•  Microsoft Cloud Security Benchmark. &lt;https://learn.microsoft.com/security/benchmark/azure/&gt;</a:t>
-            </a:r>
-          </a:p>
-          <a:p>
-            <a:pPr>
-              <a:spcAft>
-                <a:spcPts val="600"/>
-              </a:spcAft>
-            </a:pPr>
-            <a:r>
-              <a:rPr sz="1500">
-                <a:solidFill>
-                  <a:srgbClr val="22282E"/>
-                </a:solidFill>
-              </a:rPr>
-              <a:t>•  Microsoft Defender for Cloud docs. &lt;https://learn.microsoft.com/azure/defender-for-cloud/&gt;</a:t>
-            </a:r>
-          </a:p>
-          <a:p>
-            <a:pPr>
-              <a:spcAft>
-                <a:spcPts val="600"/>
-              </a:spcAft>
-            </a:pPr>
-            <a:r>
-              <a:rPr sz="1500">
-                <a:solidFill>
-                  <a:srgbClr val="22282E"/>
-                </a:solidFill>
-              </a:rPr>
-              <a:t>•  Azure RBAC docs. &lt;https://learn.microsoft.com/azure/role-based-access-control/&gt;</a:t>
-            </a:r>
-          </a:p>
-          <a:p>
-            <a:pPr>
-              <a:spcAft>
-                <a:spcPts val="600"/>
-              </a:spcAft>
-            </a:pPr>
-            <a:r>
-              <a:rPr sz="1500">
-                <a:solidFill>
-                  <a:srgbClr val="22282E"/>
-                </a:solidFill>
-              </a:rPr>
-              <a:t>•  Azure Key Vault best practices. &lt;https://learn.microsoft.com/azure/key-vault/general/best-practices&gt;</a:t>
-            </a:r>
-          </a:p>
-          <a:p>
-            <a:pPr>
-              <a:spcAft>
-                <a:spcPts val="600"/>
-              </a:spcAft>
-            </a:pPr>
-            <a:r>
-              <a:rPr sz="1500">
-                <a:solidFill>
-                  <a:srgbClr val="22282E"/>
-                </a:solidFill>
-              </a:rPr>
-              <a:t>•  CIS Microsoft Azure Foundations Benchmark. &lt;https://www.cisecurity.org/benchmark/azure&gt;</a:t>
-            </a:r>
-          </a:p>
-        </p:txBody>
-      </p:sp>
+              <a:t>•  Endurece una suscripción de laboratorio: MFA obligatorio para admins, una Azure Policy de Deny</a:t>
+            </a:r>
+          </a:p>
+          <a:p>
+            <a:pPr>
+              <a:spcAft>
+                <a:spcPts val="600"/>
+              </a:spcAft>
+            </a:pPr>
+            <a:r>
+              <a:rPr sz="1500">
+                <a:solidFill>
+                  <a:srgbClr val="22282E"/>
+                </a:solidFill>
+              </a:rPr>
+              <a:t>•  sobre almacenamiento público aplicada por Management Group, Defender for Cloud activo y un Key Vault</a:t>
+            </a:r>
+          </a:p>
+          <a:p>
+            <a:pPr>
+              <a:spcAft>
+                <a:spcPts val="600"/>
+              </a:spcAft>
+            </a:pPr>
+            <a:r>
+              <a:rPr sz="1500">
+                <a:solidFill>
+                  <a:srgbClr val="22282E"/>
+                </a:solidFill>
+              </a:rPr>
+              <a:t>•  con acceso solo por managed identity.</a:t>
+            </a:r>
+          </a:p>
+          <a:p>
+            <a:pPr>
+              <a:spcAft>
+                <a:spcPts val="600"/>
+              </a:spcAft>
+            </a:pPr>
+            <a:r>
+              <a:rPr sz="1500">
+                <a:solidFill>
+                  <a:srgbClr val="22282E"/>
+                </a:solidFill>
+              </a:rPr>
+              <a:t>•  Criterio de aceptación: intentar crear una cuenta de almacenamiento pública es bloqueado por la</a:t>
+            </a:r>
+          </a:p>
+          <a:p>
+            <a:pPr>
+              <a:spcAft>
+                <a:spcPts val="600"/>
+              </a:spcAft>
+            </a:pPr>
+            <a:r>
+              <a:rPr sz="1500">
+                <a:solidFill>
+                  <a:srgbClr val="22282E"/>
+                </a:solidFill>
+              </a:rPr>
+              <a:t>•  policy, el Secure Score sube respecto al estado inicial, y prowler azure reporta como PASS los</a:t>
+            </a:r>
+          </a:p>
+          <a:p>
+            <a:pPr>
+              <a:spcAft>
+                <a:spcPts val="600"/>
+              </a:spcAft>
+            </a:pPr>
+            <a:r>
+              <a:rPr sz="1500">
+                <a:solidFill>
+                  <a:srgbClr val="22282E"/>
+                </a:solidFill>
+              </a:rPr>
+              <a:t>•  controles de MFA y almacenamiento.</a:t>
+            </a:r>
+          </a:p>
+        </p:txBody>
+      </p:sp>
+    </p:spTree>
+  </p:cSld>
+  <p:clrMapOvr>
+    <a:masterClrMapping/>
+  </p:clrMapOvr>
+</p:sld>
+</file>
+
+<file path=ppt/slides/slide13.xml><?xml version="1.0" encoding="utf-8"?>
+<p:sld xmlns:a="http://schemas.openxmlformats.org/drawingml/2006/main" xmlns:p="http://schemas.openxmlformats.org/presentationml/2006/main" xmlns:r="http://schemas.openxmlformats.org/officeDocument/2006/relationships">
+  <p:cSld>
+    <p:spTree>
+      <p:nvGrpSpPr>
+        <p:cNvPr id="1" name=""/>
+        <p:cNvGrpSpPr/>
+        <p:nvPr/>
+      </p:nvGrpSpPr>
+      <p:grpSpPr/>
+      <p:sp>
+        <p:nvSpPr>
+          <p:cNvPr id="2" name="TextBox 1"/>
+          <p:cNvSpPr txBox="1"/>
+          <p:nvPr/>
+        </p:nvSpPr>
+        <p:spPr>
+          <a:xfrm>
+            <a:off x="457200" y="320040"/>
+            <a:ext cx="8229600" cy="822960"/>
+          </a:xfrm>
+          <a:prstGeom prst="rect">
+            <a:avLst/>
+          </a:prstGeom>
+          <a:noFill/>
+        </p:spPr>
+        <p:txBody>
+          <a:bodyPr wrap="square">
+            <a:spAutoFit/>
+          </a:bodyPr>
+          <a:lstStyle/>
+          <a:p>
+            <a:r>
+              <a:rPr sz="2600" b="1">
+                <a:solidFill>
+                  <a:srgbClr val="0B3D2E"/>
+                </a:solidFill>
+              </a:rPr>
+              <a:t>⚠️ Errores comunes</a:t>
+            </a:r>
+          </a:p>
+        </p:txBody>
+      </p:sp>
+      <p:sp>
+        <p:nvSpPr>
+          <p:cNvPr id="3" name="TextBox 2"/>
+          <p:cNvSpPr txBox="1"/>
+          <p:nvPr/>
+        </p:nvSpPr>
+        <p:spPr>
+          <a:xfrm>
+            <a:off x="457200" y="1280160"/>
+            <a:ext cx="8229600" cy="4937760"/>
+          </a:xfrm>
+          <a:prstGeom prst="rect">
+            <a:avLst/>
+          </a:prstGeom>
+          <a:noFill/>
+        </p:spPr>
+        <p:txBody>
+          <a:bodyPr wrap="square">
+            <a:spAutoFit/>
+          </a:bodyPr>
+          <a:lstStyle/>
+          <a:p>
+            <a:pPr>
+              <a:spcAft>
+                <a:spcPts val="600"/>
+              </a:spcAft>
+            </a:pPr>
+            <a:r>
+              <a:rPr sz="1500">
+                <a:solidFill>
+                  <a:srgbClr val="22282E"/>
+                </a:solidFill>
+              </a:rPr>
+              <a:t>•  Rol asignado pero sin permisos esperados — Ámbito equivocado; verifica si se asignó a recurso, grupo o suscripción.</a:t>
+            </a:r>
+          </a:p>
+          <a:p>
+            <a:pPr>
+              <a:spcAft>
+                <a:spcPts val="600"/>
+              </a:spcAft>
+            </a:pPr>
+            <a:r>
+              <a:rPr sz="1500">
+                <a:solidFill>
+                  <a:srgbClr val="22282E"/>
+                </a:solidFill>
+              </a:rPr>
+              <a:t>•  Policy no bloquea despliegues — Efecto en Audit en vez de Deny; cambia el efecto y reasigna.</a:t>
+            </a:r>
+          </a:p>
+          <a:p>
+            <a:pPr>
+              <a:spcAft>
+                <a:spcPts val="600"/>
+              </a:spcAft>
+            </a:pPr>
+            <a:r>
+              <a:rPr sz="1500">
+                <a:solidFill>
+                  <a:srgbClr val="22282E"/>
+                </a:solidFill>
+              </a:rPr>
+              <a:t>•  NSG "no aplica" a una VM — Regla de menor prioridad la anula, o el NSG está en la subred equivocada.</a:t>
+            </a:r>
+          </a:p>
+          <a:p>
+            <a:pPr>
+              <a:spcAft>
+                <a:spcPts val="600"/>
+              </a:spcAft>
+            </a:pPr>
+            <a:r>
+              <a:rPr sz="1500">
+                <a:solidFill>
+                  <a:srgbClr val="22282E"/>
+                </a:solidFill>
+              </a:rPr>
+              <a:t>•  Secreto en el código de la app — No se usó Key Vault + managed identity; migra y rota el secreto.</a:t>
+            </a:r>
+          </a:p>
+          <a:p>
+            <a:pPr>
+              <a:spcAft>
+                <a:spcPts val="600"/>
+              </a:spcAft>
+            </a:pPr>
+            <a:r>
+              <a:rPr sz="1500">
+                <a:solidFill>
+                  <a:srgbClr val="22282E"/>
+                </a:solidFill>
+              </a:rPr>
+              <a:t>•  Secure Score estancado — Recomendaciones marcadas como exentas; revisa exenciones y aplica los controles.</a:t>
+            </a:r>
+          </a:p>
+        </p:txBody>
+      </p:sp>
+    </p:spTree>
+  </p:cSld>
+  <p:clrMapOvr>
+    <a:masterClrMapping/>
+  </p:clrMapOvr>
+</p:sld>
+</file>
+
+<file path=ppt/slides/slide14.xml><?xml version="1.0" encoding="utf-8"?>
+<p:sld xmlns:a="http://schemas.openxmlformats.org/drawingml/2006/main" xmlns:p="http://schemas.openxmlformats.org/presentationml/2006/main" xmlns:r="http://schemas.openxmlformats.org/officeDocument/2006/relationships">
+  <p:cSld>
+    <p:spTree>
+      <p:nvGrpSpPr>
+        <p:cNvPr id="1" name=""/>
+        <p:cNvGrpSpPr/>
+        <p:nvPr/>
+      </p:nvGrpSpPr>
+      <p:grpSpPr/>
+      <p:sp>
+        <p:nvSpPr>
+          <p:cNvPr id="2" name="TextBox 1"/>
+          <p:cNvSpPr txBox="1"/>
+          <p:nvPr/>
+        </p:nvSpPr>
+        <p:spPr>
+          <a:xfrm>
+            <a:off x="457200" y="320040"/>
+            <a:ext cx="8229600" cy="822960"/>
+          </a:xfrm>
+          <a:prstGeom prst="rect">
+            <a:avLst/>
+          </a:prstGeom>
+          <a:noFill/>
+        </p:spPr>
+        <p:txBody>
+          <a:bodyPr wrap="square">
+            <a:spAutoFit/>
+          </a:bodyPr>
+          <a:lstStyle/>
+          <a:p>
+            <a:r>
+              <a:rPr sz="2600" b="1">
+                <a:solidFill>
+                  <a:srgbClr val="0B3D2E"/>
+                </a:solidFill>
+              </a:rPr>
+              <a:t>❓ Preguntas frecuentes</a:t>
+            </a:r>
+          </a:p>
+        </p:txBody>
+      </p:sp>
+      <p:sp>
+        <p:nvSpPr>
+          <p:cNvPr id="3" name="TextBox 2"/>
+          <p:cNvSpPr txBox="1"/>
+          <p:nvPr/>
+        </p:nvSpPr>
+        <p:spPr>
+          <a:xfrm>
+            <a:off x="457200" y="1280160"/>
+            <a:ext cx="8229600" cy="4937760"/>
+          </a:xfrm>
+          <a:prstGeom prst="rect">
+            <a:avLst/>
+          </a:prstGeom>
+          <a:noFill/>
+        </p:spPr>
+        <p:txBody>
+          <a:bodyPr wrap="square">
+            <a:spAutoFit/>
+          </a:bodyPr>
+          <a:lstStyle/>
+          <a:p>
+            <a:pPr>
+              <a:spcAft>
+                <a:spcPts val="600"/>
+              </a:spcAft>
+            </a:pPr>
+            <a:r>
+              <a:rPr sz="1500">
+                <a:solidFill>
+                  <a:srgbClr val="22282E"/>
+                </a:solidFill>
+              </a:rPr>
+              <a:t>•  ❓ ¿Cuál es la diferencia entre roles de Entra ID y roles de Azure RBAC?</a:t>
+            </a:r>
+          </a:p>
+          <a:p>
+            <a:pPr>
+              <a:spcAft>
+                <a:spcPts val="600"/>
+              </a:spcAft>
+            </a:pPr>
+            <a:r>
+              <a:rPr sz="1500">
+                <a:solidFill>
+                  <a:srgbClr val="22282E"/>
+                </a:solidFill>
+              </a:rPr>
+              <a:t>•  Los roles de Entra ID gobiernan el directorio (usuarios, grupos, apps); los de Azure RBAC gobiernan recursos (VMs, storage). Un Global Admin de Entra no es automáticamente Owner de recursos.</a:t>
+            </a:r>
+          </a:p>
+          <a:p>
+            <a:pPr>
+              <a:spcAft>
+                <a:spcPts val="600"/>
+              </a:spcAft>
+            </a:pPr>
+            <a:r>
+              <a:rPr sz="1500">
+                <a:solidFill>
+                  <a:srgbClr val="22282E"/>
+                </a:solidFill>
+              </a:rPr>
+              <a:t>•  ❓ ¿Defender for Cloud tiene coste?</a:t>
+            </a:r>
+          </a:p>
+          <a:p>
+            <a:pPr>
+              <a:spcAft>
+                <a:spcPts val="600"/>
+              </a:spcAft>
+            </a:pPr>
+            <a:r>
+              <a:rPr sz="1500">
+                <a:solidFill>
+                  <a:srgbClr val="22282E"/>
+                </a:solidFill>
+              </a:rPr>
+              <a:t>•  El nivel CSPM básico es gratuito; los planes de protección de cargas (servidores, contenedores, bases de datos) se facturan por recurso. Actívalos según el riesgo.</a:t>
+            </a:r>
+          </a:p>
+          <a:p>
+            <a:pPr>
+              <a:spcAft>
+                <a:spcPts val="600"/>
+              </a:spcAft>
+            </a:pPr>
+            <a:r>
+              <a:rPr sz="1500">
+                <a:solidFill>
+                  <a:srgbClr val="22282E"/>
+                </a:solidFill>
+              </a:rPr>
+              <a:t>•  ❓ ¿Managed identity o service principal con secreto?</a:t>
+            </a:r>
+          </a:p>
+          <a:p>
+            <a:pPr>
+              <a:spcAft>
+                <a:spcPts val="600"/>
+              </a:spcAft>
+            </a:pPr>
+            <a:r>
+              <a:rPr sz="1500">
+                <a:solidFill>
+                  <a:srgbClr val="22282E"/>
+                </a:solidFill>
+              </a:rPr>
+              <a:t>•  Managed identity cuando el servicio y la arquitectura la soporten: evita una credencial de aplicación administrada por el equipo. Aun así, protege la carga, limita su RBAC y monitorea la emisión y…</a:t>
+            </a:r>
+          </a:p>
+        </p:txBody>
+      </p:sp>
+    </p:spTree>
+  </p:cSld>
+  <p:clrMapOvr>
+    <a:masterClrMapping/>
+  </p:clrMapOvr>
+</p:sld>
+</file>
+
+<file path=ppt/slides/slide15.xml><?xml version="1.0" encoding="utf-8"?>
+<p:sld xmlns:a="http://schemas.openxmlformats.org/drawingml/2006/main" xmlns:p="http://schemas.openxmlformats.org/presentationml/2006/main" xmlns:r="http://schemas.openxmlformats.org/officeDocument/2006/relationships">
+  <p:cSld>
+    <p:spTree>
+      <p:nvGrpSpPr>
+        <p:cNvPr id="1" name=""/>
+        <p:cNvGrpSpPr/>
+        <p:nvPr/>
+      </p:nvGrpSpPr>
+      <p:grpSpPr/>
+      <p:sp>
+        <p:nvSpPr>
+          <p:cNvPr id="2" name="TextBox 1"/>
+          <p:cNvSpPr txBox="1"/>
+          <p:nvPr/>
+        </p:nvSpPr>
+        <p:spPr>
+          <a:xfrm>
+            <a:off x="457200" y="320040"/>
+            <a:ext cx="8229600" cy="822960"/>
+          </a:xfrm>
+          <a:prstGeom prst="rect">
+            <a:avLst/>
+          </a:prstGeom>
+          <a:noFill/>
+        </p:spPr>
+        <p:txBody>
+          <a:bodyPr wrap="square">
+            <a:spAutoFit/>
+          </a:bodyPr>
+          <a:lstStyle/>
+          <a:p>
+            <a:r>
+              <a:rPr sz="2600" b="1">
+                <a:solidFill>
+                  <a:srgbClr val="0B3D2E"/>
+                </a:solidFill>
+              </a:rPr>
+              <a:t>🔗 Referencias verificables y alcance</a:t>
+            </a:r>
+          </a:p>
+        </p:txBody>
+      </p:sp>
+      <p:sp>
+        <p:nvSpPr>
+          <p:cNvPr id="3" name="TextBox 2"/>
+          <p:cNvSpPr txBox="1"/>
+          <p:nvPr/>
+        </p:nvSpPr>
+        <p:spPr>
+          <a:xfrm>
+            <a:off x="457200" y="1280160"/>
+            <a:ext cx="8229600" cy="4937760"/>
+          </a:xfrm>
+          <a:prstGeom prst="rect">
+            <a:avLst/>
+          </a:prstGeom>
+          <a:noFill/>
+        </p:spPr>
+        <p:txBody>
+          <a:bodyPr wrap="square">
+            <a:spAutoFit/>
+          </a:bodyPr>
+          <a:lstStyle/>
+          <a:p>
+            <a:pPr>
+              <a:spcAft>
+                <a:spcPts val="600"/>
+              </a:spcAft>
+            </a:pPr>
+            <a:r>
+              <a:rPr sz="1500">
+                <a:solidFill>
+                  <a:srgbClr val="22282E"/>
+                </a:solidFill>
+              </a:rPr>
+              <a:t>•  Microsoft Cloud Security Benchmark. &lt;https://learn.microsoft.com/security/benchmark/azure/&gt; — baseline oficial de controles y responsabilidades.</a:t>
+            </a:r>
+          </a:p>
+          <a:p>
+            <a:pPr>
+              <a:spcAft>
+                <a:spcPts val="600"/>
+              </a:spcAft>
+            </a:pPr>
+            <a:r>
+              <a:rPr sz="1500">
+                <a:solidFill>
+                  <a:srgbClr val="22282E"/>
+                </a:solidFill>
+              </a:rPr>
+              <a:t>•  Azure RBAC. &lt;https://learn.microsoft.com/azure/role-based-access-control/&gt; — documentación oficial de roles, asignaciones y ámbitos.</a:t>
+            </a:r>
+          </a:p>
+          <a:p>
+            <a:pPr>
+              <a:spcAft>
+                <a:spcPts val="600"/>
+              </a:spcAft>
+            </a:pPr>
+            <a:r>
+              <a:rPr sz="1500">
+                <a:solidFill>
+                  <a:srgbClr val="22282E"/>
+                </a:solidFill>
+              </a:rPr>
+              <a:t>•  Azure Policy. &lt;https://learn.microsoft.com/azure/governance/policy/overview&gt; — efectos, herencia y evaluación oficial; no reemplaza RBAC.</a:t>
+            </a:r>
+          </a:p>
+          <a:p>
+            <a:pPr>
+              <a:spcAft>
+                <a:spcPts val="600"/>
+              </a:spcAft>
+            </a:pPr>
+            <a:r>
+              <a:rPr sz="1500">
+                <a:solidFill>
+                  <a:srgbClr val="22282E"/>
+                </a:solidFill>
+              </a:rPr>
+              <a:t>•  Defender for Cloud. &lt;https://learn.microsoft.com/azure/defender-for-cloud/&gt; — planes y capacidades actuales; confirmar qué está habilitado.</a:t>
+            </a:r>
+          </a:p>
+          <a:p>
+            <a:pPr>
+              <a:spcAft>
+                <a:spcPts val="600"/>
+              </a:spcAft>
+            </a:pPr>
+            <a:r>
+              <a:rPr sz="1500">
+                <a:solidFill>
+                  <a:srgbClr val="22282E"/>
+                </a:solidFill>
+              </a:rPr>
+              <a:t>•  Azure Key Vault best practices. &lt;https://learn.microsoft.com/azure/key-vault/general/best-practices&gt; — recomendaciones oficiales de identidad, red, rotación y recuperación.</a:t>
+            </a:r>
+          </a:p>
+          <a:p>
+            <a:pPr>
+              <a:spcAft>
+                <a:spcPts val="600"/>
+              </a:spcAft>
+            </a:pPr>
+            <a:r>
+              <a:rPr sz="1500">
+                <a:solidFill>
+                  <a:srgbClr val="22282E"/>
+                </a:solidFill>
+              </a:rPr>
+              <a:t>•  CIS Azure Foundations Benchmark. &lt;https://www.cisecurity.org/benchmark/azure&gt; — baseline complementaria con versión y perfil explícitos.</a:t>
+            </a:r>
+          </a:p>
+        </p:txBody>
+      </p:sp>
+    </p:spTree>
+  </p:cSld>
+  <p:clrMapOvr>
+    <a:masterClrMapping/>
+  </p:clrMapOvr>
+</p:sld>
+</file>
+
+<file path=ppt/slides/slide16.xml><?xml version="1.0" encoding="utf-8"?>
+<p:sld xmlns:a="http://schemas.openxmlformats.org/drawingml/2006/main" xmlns:p="http://schemas.openxmlformats.org/presentationml/2006/main" xmlns:r="http://schemas.openxmlformats.org/officeDocument/2006/relationships">
+  <p:cSld>
+    <p:spTree>
+      <p:nvGrpSpPr>
+        <p:cNvPr id="1" name=""/>
+        <p:cNvGrpSpPr/>
+        <p:nvPr/>
+      </p:nvGrpSpPr>
+      <p:grpSpPr/>
+      <p:sp>
+        <p:nvSpPr>
+          <p:cNvPr id="2" name="TextBox 1"/>
+          <p:cNvSpPr txBox="1"/>
+          <p:nvPr/>
+        </p:nvSpPr>
+        <p:spPr>
+          <a:xfrm>
+            <a:off x="457200" y="274320"/>
+            <a:ext cx="8229600" cy="640080"/>
+          </a:xfrm>
+          <a:prstGeom prst="rect">
+            <a:avLst/>
+          </a:prstGeom>
+          <a:noFill/>
+        </p:spPr>
+        <p:txBody>
+          <a:bodyPr wrap="square">
+            <a:spAutoFit/>
+          </a:bodyPr>
+          <a:lstStyle/>
+          <a:p>
+            <a:r>
+              <a:rPr sz="2200" b="1">
+                <a:solidFill>
+                  <a:srgbClr val="0B3D2E"/>
+                </a:solidFill>
+              </a:rPr>
+              <a:t>Diagrama de la clase</a:t>
+            </a:r>
+          </a:p>
+        </p:txBody>
+      </p:sp>
+      <p:pic>
+        <p:nvPicPr>
+          <p:cNvPr id="3" name="Picture 2" descr="9a0ce98522ba3ba5.png"/>
+          <p:cNvPicPr>
+            <a:picLocks noChangeAspect="1"/>
+          </p:cNvPicPr>
+          <p:nvPr/>
+        </p:nvPicPr>
+        <p:blipFill>
+          <a:blip r:embed="rId2"/>
+          <a:stretch>
+            <a:fillRect/>
+          </a:stretch>
+        </p:blipFill>
+        <p:spPr>
+          <a:xfrm>
+            <a:off x="1523678" y="1097280"/>
+            <a:ext cx="6096644" cy="5303520"/>
+          </a:xfrm>
+          <a:prstGeom prst="rect">
+            <a:avLst/>
+          </a:prstGeom>
+        </p:spPr>
+      </p:pic>
     </p:spTree>
   </p:cSld>
   <p:clrMapOvr>
@@ -4137,7 +4738,7 @@
                   <a:srgbClr val="0B3D2E"/>
                 </a:solidFill>
               </a:rPr>
-              <a:t>📖 Definiciones y características</a:t>
+              <a:t>🧠 Explicación en profundidad</a:t>
             </a:r>
           </a:p>
         </p:txBody>
@@ -4175,97 +4776,67 @@
                   <a:srgbClr val="22282E"/>
                 </a:solidFill>
               </a:rPr>
-              <a:t>•  Microsoft Entra ID: servicio de identidad de Azure. Clave: MFA y Conditional Access son la primera línea de defensa.</a:t>
-            </a:r>
-          </a:p>
-          <a:p>
-            <a:pPr>
-              <a:spcAft>
-                <a:spcPts val="600"/>
-              </a:spcAft>
-            </a:pPr>
-            <a:r>
-              <a:rPr sz="1500">
-                <a:solidFill>
-                  <a:srgbClr val="22282E"/>
-                </a:solidFill>
-              </a:rPr>
-              <a:t>•  Azure RBAC: asignación de roles (Owner, Contributor, Reader…) por ámbito. Clave: el ámbito puede ser suscripción, grupo de recursos o recurso.</a:t>
-            </a:r>
-          </a:p>
-          <a:p>
-            <a:pPr>
-              <a:spcAft>
-                <a:spcPts val="600"/>
-              </a:spcAft>
-            </a:pPr>
-            <a:r>
-              <a:rPr sz="1500">
-                <a:solidFill>
-                  <a:srgbClr val="22282E"/>
-                </a:solidFill>
-              </a:rPr>
-              <a:t>•  Management Group: contenedor jerárquico de suscripciones. Clave: permite aplicar policy heredada a toda la organización.</a:t>
-            </a:r>
-          </a:p>
-          <a:p>
-            <a:pPr>
-              <a:spcAft>
-                <a:spcPts val="600"/>
-              </a:spcAft>
-            </a:pPr>
-            <a:r>
-              <a:rPr sz="1500">
-                <a:solidFill>
-                  <a:srgbClr val="22282E"/>
-                </a:solidFill>
-              </a:rPr>
-              <a:t>•  Azure Policy: reglas que auditan o fuerzan configuraciones. Clave: efecto Deny bloquea despliegues no conformes.</a:t>
-            </a:r>
-          </a:p>
-          <a:p>
-            <a:pPr>
-              <a:spcAft>
-                <a:spcPts val="600"/>
-              </a:spcAft>
-            </a:pPr>
-            <a:r>
-              <a:rPr sz="1500">
-                <a:solidFill>
-                  <a:srgbClr val="22282E"/>
-                </a:solidFill>
-              </a:rPr>
-              <a:t>•  NSG: firewall stateful sobre subred o NIC. Clave: reglas por prioridad; la más baja gana.</a:t>
-            </a:r>
-          </a:p>
-          <a:p>
-            <a:pPr>
-              <a:spcAft>
-                <a:spcPts val="600"/>
-              </a:spcAft>
-            </a:pPr>
-            <a:r>
-              <a:rPr sz="1500">
-                <a:solidFill>
-                  <a:srgbClr val="22282E"/>
-                </a:solidFill>
-              </a:rPr>
-              <a:t>•  Defender for Cloud: CSPM + protección de cargas. Clave: el Secure Score cuantifica la postura.</a:t>
-            </a:r>
-          </a:p>
-          <a:p>
-            <a:pPr>
-              <a:spcAft>
-                <a:spcPts val="600"/>
-              </a:spcAft>
-            </a:pPr>
-            <a:r>
-              <a:rPr sz="1500">
-                <a:solidFill>
-                  <a:srgbClr val="22282E"/>
-                </a:solidFill>
-              </a:rPr>
-              <a:t>•  Key Vault: almacén gestionado de secretos y claves. Clave: acceso vía RBAC/policy y auditado.</a:t>
+              <a:t>•  Azure separa el tenant de identidad de la jerarquía de administración de recursos. Microsoft Entra ID autentica identidades; Azure RBAC autoriza acciones sobre management groups, suscripciones…</a:t>
+            </a:r>
+          </a:p>
+          <a:p>
+            <a:pPr>
+              <a:spcAft>
+                <a:spcPts val="600"/>
+              </a:spcAft>
+            </a:pPr>
+            <a:r>
+              <a:rPr sz="1500">
+                <a:solidFill>
+                  <a:srgbClr val="22282E"/>
+                </a:solidFill>
+              </a:rPr>
+              <a:t>•  El diagrama muestra dos árboles que convergen: identidad y recursos. Una asignación RBAC contiene principal, definición de rol y ámbito; la herencia baja por la jerarquía. Azure Policy evalúa…</a:t>
+            </a:r>
+          </a:p>
+          <a:p>
+            <a:pPr>
+              <a:spcAft>
+                <a:spcPts val="600"/>
+              </a:spcAft>
+            </a:pPr>
+            <a:r>
+              <a:rPr sz="1500">
+                <a:solidFill>
+                  <a:srgbClr val="22282E"/>
+                </a:solidFill>
+              </a:rPr>
+              <a:t>•  NSG aplica reglas stateful a NIC o subred y resuelve prioridades numéricas; una regla con número menor tiene mayor prioridad. Azure Firewall ofrece control centralizado y otras capacidades; Private…</a:t>
+            </a:r>
+          </a:p>
+          <a:p>
+            <a:pPr>
+              <a:spcAft>
+                <a:spcPts val="600"/>
+              </a:spcAft>
+            </a:pPr>
+            <a:r>
+              <a:rPr sz="1500">
+                <a:solidFill>
+                  <a:srgbClr val="22282E"/>
+                </a:solidFill>
+              </a:rPr>
+              <a:t>•  Key Vault conserva claves, secretos y certificados con modelos de autorización y logging. Una managed identity permite que una carga obtenga token sin secreto de aplicación almacenado. Esto reduce…</a:t>
+            </a:r>
+          </a:p>
+          <a:p>
+            <a:pPr>
+              <a:spcAft>
+                <a:spcPts val="600"/>
+              </a:spcAft>
+            </a:pPr>
+            <a:r>
+              <a:rPr sz="1500">
+                <a:solidFill>
+                  <a:srgbClr val="22282E"/>
+                </a:solidFill>
+              </a:rPr>
+              <a:t>•  Defender for Cloud combina recomendaciones de postura con planes de protección de cargas. Secure Score prioriza mejoras según el modelo del producto, no cuantifica por sí solo el riesgo empresarial.…</a:t>
             </a:r>
           </a:p>
         </p:txBody>
@@ -4316,7 +4887,7 @@
                   <a:srgbClr val="0B3D2E"/>
                 </a:solidFill>
               </a:rPr>
-              <a:t>🧰 Herramientas y preparación</a:t>
+              <a:t>📖 Definiciones y características</a:t>
             </a:r>
           </a:p>
         </p:txBody>
@@ -4354,67 +4925,97 @@
                   <a:srgbClr val="22282E"/>
                 </a:solidFill>
               </a:rPr>
-              <a:t>•  CLI az autenticada en una suscripción de laboratorio.</a:t>
-            </a:r>
-          </a:p>
-          <a:p>
-            <a:pPr>
-              <a:spcAft>
-                <a:spcPts val="600"/>
-              </a:spcAft>
-            </a:pPr>
-            <a:r>
-              <a:rPr sz="1500">
-                <a:solidFill>
-                  <a:srgbClr val="22282E"/>
-                </a:solidFill>
-              </a:rPr>
-              <a:t>•  ScoutSuite con el proveedor azure para auditoría.</a:t>
-            </a:r>
-          </a:p>
-          <a:p>
-            <a:pPr>
-              <a:spcAft>
-                <a:spcPts val="600"/>
-              </a:spcAft>
-            </a:pPr>
-            <a:r>
-              <a:rPr sz="1500">
-                <a:solidFill>
-                  <a:srgbClr val="22282E"/>
-                </a:solidFill>
-              </a:rPr>
-              <a:t>•  Prowler también soporta Azure (prowler azure).</a:t>
-            </a:r>
-          </a:p>
-          <a:p>
-            <a:pPr>
-              <a:spcAft>
-                <a:spcPts val="600"/>
-              </a:spcAft>
-            </a:pPr>
-            <a:r>
-              <a:rPr sz="1500">
-                <a:solidFill>
-                  <a:srgbClr val="22282E"/>
-                </a:solidFill>
-              </a:rPr>
-              <a:t>•  az role assignment list --all -o table</a:t>
-            </a:r>
-          </a:p>
-          <a:p>
-            <a:pPr>
-              <a:spcAft>
-                <a:spcPts val="600"/>
-              </a:spcAft>
-            </a:pPr>
-            <a:r>
-              <a:rPr sz="1500">
-                <a:solidFill>
-                  <a:srgbClr val="22282E"/>
-                </a:solidFill>
-              </a:rPr>
-              <a:t>•  az security pricing list -o table</a:t>
+              <a:t>•  Microsoft Entra ID: servicio de identidad y directorio. Clave: autenticación, Conditional Access y gobierno de identidades complementan la autorización Azure RBAC.</a:t>
+            </a:r>
+          </a:p>
+          <a:p>
+            <a:pPr>
+              <a:spcAft>
+                <a:spcPts val="600"/>
+              </a:spcAft>
+            </a:pPr>
+            <a:r>
+              <a:rPr sz="1500">
+                <a:solidFill>
+                  <a:srgbClr val="22282E"/>
+                </a:solidFill>
+              </a:rPr>
+              <a:t>•  Azure RBAC: asignación de roles (Owner, Contributor, Reader…) por ámbito. Clave: el ámbito puede ser suscripción, grupo de recursos o recurso.</a:t>
+            </a:r>
+          </a:p>
+          <a:p>
+            <a:pPr>
+              <a:spcAft>
+                <a:spcPts val="600"/>
+              </a:spcAft>
+            </a:pPr>
+            <a:r>
+              <a:rPr sz="1500">
+                <a:solidFill>
+                  <a:srgbClr val="22282E"/>
+                </a:solidFill>
+              </a:rPr>
+              <a:t>•  Management Group: contenedor jerárquico de suscripciones. Clave: permite aplicar policy heredada a toda la organización.</a:t>
+            </a:r>
+          </a:p>
+          <a:p>
+            <a:pPr>
+              <a:spcAft>
+                <a:spcPts val="600"/>
+              </a:spcAft>
+            </a:pPr>
+            <a:r>
+              <a:rPr sz="1500">
+                <a:solidFill>
+                  <a:srgbClr val="22282E"/>
+                </a:solidFill>
+              </a:rPr>
+              <a:t>•  Azure Policy: reglas que auditan o fuerzan configuraciones. Clave: efecto Deny bloquea despliegues no conformes.</a:t>
+            </a:r>
+          </a:p>
+          <a:p>
+            <a:pPr>
+              <a:spcAft>
+                <a:spcPts val="600"/>
+              </a:spcAft>
+            </a:pPr>
+            <a:r>
+              <a:rPr sz="1500">
+                <a:solidFill>
+                  <a:srgbClr val="22282E"/>
+                </a:solidFill>
+              </a:rPr>
+              <a:t>•  NSG: filtro stateful sobre subred o NIC. Clave: el número de prioridad menor se evalúa antes; se consideran reglas efectivas en ambos ámbitos.</a:t>
+            </a:r>
+          </a:p>
+          <a:p>
+            <a:pPr>
+              <a:spcAft>
+                <a:spcPts val="600"/>
+              </a:spcAft>
+            </a:pPr>
+            <a:r>
+              <a:rPr sz="1500">
+                <a:solidFill>
+                  <a:srgbClr val="22282E"/>
+                </a:solidFill>
+              </a:rPr>
+              <a:t>•  Defender for Cloud: capacidades de postura y protección según planes habilitados. Clave: Secure Score representa recomendaciones del servicio, no una medida completa de riesgo.</a:t>
+            </a:r>
+          </a:p>
+          <a:p>
+            <a:pPr>
+              <a:spcAft>
+                <a:spcPts val="600"/>
+              </a:spcAft>
+            </a:pPr>
+            <a:r>
+              <a:rPr sz="1500">
+                <a:solidFill>
+                  <a:srgbClr val="22282E"/>
+                </a:solidFill>
+              </a:rPr>
+              <a:t>•  Key Vault: almacén gestionado de secretos y claves. Clave: acceso vía RBAC/policy y auditado.</a:t>
             </a:r>
           </a:p>
         </p:txBody>
@@ -4465,7 +5066,7 @@
                   <a:srgbClr val="0B3D2E"/>
                 </a:solidFill>
               </a:rPr>
-              <a:t>🧪 Laboratorio guiado</a:t>
+              <a:t>🔍 Caso razonado — Contributor no puede leer un secreto</a:t>
             </a:r>
           </a:p>
         </p:txBody>
@@ -4503,97 +5104,22 @@
                   <a:srgbClr val="22282E"/>
                 </a:solidFill>
               </a:rPr>
-              <a:t>•  Crea un grupo de recursos de laboratorio y asigna a un usuario el rol Reader solo en ese ámbito; verifica que no puede crear recursos.</a:t>
-            </a:r>
-          </a:p>
-          <a:p>
-            <a:pPr>
-              <a:spcAft>
-                <a:spcPts val="600"/>
-              </a:spcAft>
-            </a:pPr>
-            <a:r>
-              <a:rPr sz="1500">
-                <a:solidFill>
-                  <a:srgbClr val="22282E"/>
-                </a:solidFill>
-              </a:rPr>
-              <a:t>•  Habilita MFA y una política de Conditional Access que exija MFA para roles administrativos.</a:t>
-            </a:r>
-          </a:p>
-          <a:p>
-            <a:pPr>
-              <a:spcAft>
-                <a:spcPts val="600"/>
-              </a:spcAft>
-            </a:pPr>
-            <a:r>
-              <a:rPr sz="1500">
-                <a:solidFill>
-                  <a:srgbClr val="22282E"/>
-                </a:solidFill>
-              </a:rPr>
-              <a:t>•  Define un Management Group y aplica una Azure Policy que deniegue la creación de cuentas de almacenamiento con acceso público. Intenta crear una y confirma el Deny.</a:t>
-            </a:r>
-          </a:p>
-          <a:p>
-            <a:pPr>
-              <a:spcAft>
-                <a:spcPts val="600"/>
-              </a:spcAft>
-            </a:pPr>
-            <a:r>
-              <a:rPr sz="1500">
-                <a:solidFill>
-                  <a:srgbClr val="22282E"/>
-                </a:solidFill>
-              </a:rPr>
-              <a:t>•  Crea una VNet con dos subredes y un NSG que permita solo HTTPS entrante; asocia el NSG a la subred.</a:t>
-            </a:r>
-          </a:p>
-          <a:p>
-            <a:pPr>
-              <a:spcAft>
-                <a:spcPts val="600"/>
-              </a:spcAft>
-            </a:pPr>
-            <a:r>
-              <a:rPr sz="1500">
-                <a:solidFill>
-                  <a:srgbClr val="22282E"/>
-                </a:solidFill>
-              </a:rPr>
-              <a:t>•  Habilita Defender for Cloud en la suscripción, revisa el Secure Score y aplica tres recomendaciones prioritarias.</a:t>
-            </a:r>
-          </a:p>
-          <a:p>
-            <a:pPr>
-              <a:spcAft>
-                <a:spcPts val="600"/>
-              </a:spcAft>
-            </a:pPr>
-            <a:r>
-              <a:rPr sz="1500">
-                <a:solidFill>
-                  <a:srgbClr val="22282E"/>
-                </a:solidFill>
-              </a:rPr>
-              <a:t>•  Crea un Key Vault, guarda un secreto y concede acceso a una identidad administrada (managed identity) en vez de credenciales estáticas.</a:t>
-            </a:r>
-          </a:p>
-          <a:p>
-            <a:pPr>
-              <a:spcAft>
-                <a:spcPts val="600"/>
-              </a:spcAft>
-            </a:pPr>
-            <a:r>
-              <a:rPr sz="1500">
-                <a:solidFill>
-                  <a:srgbClr val="22282E"/>
-                </a:solidFill>
-              </a:rPr>
-              <a:t>•  Ejecuta scout azure o prowler azure --compliance cis2.0azure y corrige los hallazgos altos de red y almacenamiento.</a:t>
+              <a:t>•  Una persona tiene Contributor en un grupo de recursos y puede configurar el Key Vault, pero la lectura del valor depende del modelo de acceso al plano de datos. El equipo distingue control plane y…</a:t>
+            </a:r>
+          </a:p>
+          <a:p>
+            <a:pPr>
+              <a:spcAft>
+                <a:spcPts val="600"/>
+              </a:spcAft>
+            </a:pPr>
+            <a:r>
+              <a:rPr sz="1500">
+                <a:solidFill>
+                  <a:srgbClr val="22282E"/>
+                </a:solidFill>
+              </a:rPr>
+              <a:t>•  Luego Azure Policy exige deshabilitar acceso público y usar Private Endpoint. La prueba verifica DNS desde la carga, denegación desde una red externa y registros del acceso. El caso conecta…</a:t>
             </a:r>
           </a:p>
         </p:txBody>
@@ -4644,7 +5170,7 @@
                   <a:srgbClr val="0B3D2E"/>
                 </a:solidFill>
               </a:rPr>
-              <a:t>✍️ Ejercicios</a:t>
+              <a:t>✅ Criterio de dominio</a:t>
             </a:r>
           </a:p>
         </p:txBody>
@@ -4682,82 +5208,7 @@
                   <a:srgbClr val="22282E"/>
                 </a:solidFill>
               </a:rPr>
-              <a:t>•  Asigna un rol personalizado que permita solo iniciar/detener VMs, sin borrarlas.</a:t>
-            </a:r>
-          </a:p>
-          <a:p>
-            <a:pPr>
-              <a:spcAft>
-                <a:spcPts val="600"/>
-              </a:spcAft>
-            </a:pPr>
-            <a:r>
-              <a:rPr sz="1500">
-                <a:solidFill>
-                  <a:srgbClr val="22282E"/>
-                </a:solidFill>
-              </a:rPr>
-              <a:t>•  Escribe una Azure Policy que exija etiquetas obligatorias en todos los recursos.</a:t>
-            </a:r>
-          </a:p>
-          <a:p>
-            <a:pPr>
-              <a:spcAft>
-                <a:spcPts val="600"/>
-              </a:spcAft>
-            </a:pPr>
-            <a:r>
-              <a:rPr sz="1500">
-                <a:solidFill>
-                  <a:srgbClr val="22282E"/>
-                </a:solidFill>
-              </a:rPr>
-              <a:t>•  Configura un NSG con reglas por prioridad y explica cuál gana ante un conflicto.</a:t>
-            </a:r>
-          </a:p>
-          <a:p>
-            <a:pPr>
-              <a:spcAft>
-                <a:spcPts val="600"/>
-              </a:spcAft>
-            </a:pPr>
-            <a:r>
-              <a:rPr sz="1500">
-                <a:solidFill>
-                  <a:srgbClr val="22282E"/>
-                </a:solidFill>
-              </a:rPr>
-              <a:t>•  Integra una managed identity para que una VM lea un secreto de Key Vault sin credenciales.</a:t>
-            </a:r>
-          </a:p>
-          <a:p>
-            <a:pPr>
-              <a:spcAft>
-                <a:spcPts val="600"/>
-              </a:spcAft>
-            </a:pPr>
-            <a:r>
-              <a:rPr sz="1500">
-                <a:solidFill>
-                  <a:srgbClr val="22282E"/>
-                </a:solidFill>
-              </a:rPr>
-              <a:t>•  Conecta Defender for Cloud a Microsoft Sentinel y crea una regla de detección.</a:t>
-            </a:r>
-          </a:p>
-          <a:p>
-            <a:pPr>
-              <a:spcAft>
-                <a:spcPts val="600"/>
-              </a:spcAft>
-            </a:pPr>
-            <a:r>
-              <a:rPr sz="1500">
-                <a:solidFill>
-                  <a:srgbClr val="22282E"/>
-                </a:solidFill>
-              </a:rPr>
-              <a:t>•  Interpreta una recomendación de Secure Score y estima su impacto en la puntuación.</a:t>
+              <a:t>•  Dominas la clase cuando puedes dibujar tenant y jerarquía de recursos, explicar una asignación RBAC efectiva por ámbito, diferenciar Policy de autorización, validar NSG/Private Endpoint y diseñar…</a:t>
             </a:r>
           </a:p>
         </p:txBody>
@@ -4808,7 +5259,7 @@
                   <a:srgbClr val="0B3D2E"/>
                 </a:solidFill>
               </a:rPr>
-              <a:t>📝 Reto verificable</a:t>
+              <a:t>🧰 Herramientas y preparación</a:t>
             </a:r>
           </a:p>
         </p:txBody>
@@ -4846,82 +5297,37 @@
                   <a:srgbClr val="22282E"/>
                 </a:solidFill>
               </a:rPr>
-              <a:t>•  Endurece una suscripción de laboratorio: MFA obligatorio para admins, una Azure Policy de Deny</a:t>
-            </a:r>
-          </a:p>
-          <a:p>
-            <a:pPr>
-              <a:spcAft>
-                <a:spcPts val="600"/>
-              </a:spcAft>
-            </a:pPr>
-            <a:r>
-              <a:rPr sz="1500">
-                <a:solidFill>
-                  <a:srgbClr val="22282E"/>
-                </a:solidFill>
-              </a:rPr>
-              <a:t>•  sobre almacenamiento público aplicada por Management Group, Defender for Cloud activo y un Key Vault</a:t>
-            </a:r>
-          </a:p>
-          <a:p>
-            <a:pPr>
-              <a:spcAft>
-                <a:spcPts val="600"/>
-              </a:spcAft>
-            </a:pPr>
-            <a:r>
-              <a:rPr sz="1500">
-                <a:solidFill>
-                  <a:srgbClr val="22282E"/>
-                </a:solidFill>
-              </a:rPr>
-              <a:t>•  con acceso solo por managed identity.</a:t>
-            </a:r>
-          </a:p>
-          <a:p>
-            <a:pPr>
-              <a:spcAft>
-                <a:spcPts val="600"/>
-              </a:spcAft>
-            </a:pPr>
-            <a:r>
-              <a:rPr sz="1500">
-                <a:solidFill>
-                  <a:srgbClr val="22282E"/>
-                </a:solidFill>
-              </a:rPr>
-              <a:t>•  Criterio de aceptación: intentar crear una cuenta de almacenamiento pública es bloqueado por la</a:t>
-            </a:r>
-          </a:p>
-          <a:p>
-            <a:pPr>
-              <a:spcAft>
-                <a:spcPts val="600"/>
-              </a:spcAft>
-            </a:pPr>
-            <a:r>
-              <a:rPr sz="1500">
-                <a:solidFill>
-                  <a:srgbClr val="22282E"/>
-                </a:solidFill>
-              </a:rPr>
-              <a:t>•  policy, el Secure Score sube respecto al estado inicial, y prowler azure reporta como PASS los</a:t>
-            </a:r>
-          </a:p>
-          <a:p>
-            <a:pPr>
-              <a:spcAft>
-                <a:spcPts val="600"/>
-              </a:spcAft>
-            </a:pPr>
-            <a:r>
-              <a:rPr sz="1500">
-                <a:solidFill>
-                  <a:srgbClr val="22282E"/>
-                </a:solidFill>
-              </a:rPr>
-              <a:t>•  controles de MFA y almacenamiento.</a:t>
+              <a:t>•  CLI az autenticada en una suscripción de laboratorio.</a:t>
+            </a:r>
+          </a:p>
+          <a:p>
+            <a:pPr>
+              <a:spcAft>
+                <a:spcPts val="600"/>
+              </a:spcAft>
+            </a:pPr>
+            <a:r>
+              <a:rPr sz="1500">
+                <a:solidFill>
+                  <a:srgbClr val="22282E"/>
+                </a:solidFill>
+              </a:rPr>
+              <a:t>•  ScoutSuite con el proveedor azure para auditoría.</a:t>
+            </a:r>
+          </a:p>
+          <a:p>
+            <a:pPr>
+              <a:spcAft>
+                <a:spcPts val="600"/>
+              </a:spcAft>
+            </a:pPr>
+            <a:r>
+              <a:rPr sz="1500">
+                <a:solidFill>
+                  <a:srgbClr val="22282E"/>
+                </a:solidFill>
+              </a:rPr>
+              <a:t>•  Prowler también soporta Azure (prowler azure).</a:t>
             </a:r>
           </a:p>
         </p:txBody>
